--- a/templates/foundation.pptx
+++ b/templates/foundation.pptx
@@ -12450,12 +12450,24 @@
                   <a:solidFill>
                     <a:srgbClr val="1B2A4A"/>
                   </a:solidFill>
+                  <a:latin typeface="Playfair Display Bold"/>
+                  <a:ea typeface="Playfair Display Bold"/>
+                  <a:cs typeface="Playfair Display Bold"/>
+                  <a:sym typeface="Playfair Display Bold"/>
+                </a:rPr>
+                <a:t>₹</a:t>
+              </a:r>
+              <a:r>
+                <a:rPr lang="en-US" sz="2971">
+                  <a:solidFill>
+                    <a:srgbClr val="1B2A4A"/>
+                  </a:solidFill>
                   <a:latin typeface="Georgia"/>
                   <a:ea typeface="Georgia"/>
                   <a:cs typeface="Georgia"/>
                   <a:sym typeface="Georgia"/>
                 </a:rPr>
-                <a:t>₹27,000</a:t>
+                <a:t>27,000</a:t>
               </a:r>
             </a:p>
           </p:txBody>
@@ -12912,12 +12924,24 @@
                   <a:solidFill>
                     <a:srgbClr val="1B2A4A"/>
                   </a:solidFill>
+                  <a:latin typeface="Playfair Display Bold"/>
+                  <a:ea typeface="Playfair Display Bold"/>
+                  <a:cs typeface="Playfair Display Bold"/>
+                  <a:sym typeface="Playfair Display Bold"/>
+                </a:rPr>
+                <a:t>₹</a:t>
+              </a:r>
+              <a:r>
+                <a:rPr lang="en-US" sz="2971">
+                  <a:solidFill>
+                    <a:srgbClr val="1B2A4A"/>
+                  </a:solidFill>
                   <a:latin typeface="Georgia"/>
                   <a:ea typeface="Georgia"/>
                   <a:cs typeface="Georgia"/>
                   <a:sym typeface="Georgia"/>
                 </a:rPr>
-                <a:t>₹18,000</a:t>
+                <a:t>18,000</a:t>
               </a:r>
             </a:p>
           </p:txBody>
@@ -13374,12 +13398,24 @@
                   <a:solidFill>
                     <a:srgbClr val="1B2A4A"/>
                   </a:solidFill>
+                  <a:latin typeface="Playfair Display Bold"/>
+                  <a:ea typeface="Playfair Display Bold"/>
+                  <a:cs typeface="Playfair Display Bold"/>
+                  <a:sym typeface="Playfair Display Bold"/>
+                </a:rPr>
+                <a:t>₹</a:t>
+              </a:r>
+              <a:r>
+                <a:rPr lang="en-US" sz="2971">
+                  <a:solidFill>
+                    <a:srgbClr val="1B2A4A"/>
+                  </a:solidFill>
                   <a:latin typeface="Georgia"/>
                   <a:ea typeface="Georgia"/>
                   <a:cs typeface="Georgia"/>
                   <a:sym typeface="Georgia"/>
                 </a:rPr>
-                <a:t>₹45,000</a:t>
+                <a:t>45,000</a:t>
               </a:r>
             </a:p>
           </p:txBody>
@@ -17700,12 +17736,48 @@
                 <a:solidFill>
                   <a:srgbClr val="2F3A4F"/>
                 </a:solidFill>
+                <a:latin typeface="Playfair Display Bold"/>
+                <a:ea typeface="Playfair Display Bold"/>
+                <a:cs typeface="Playfair Display Bold"/>
+                <a:sym typeface="Playfair Display Bold"/>
+              </a:rPr>
+              <a:t>₹</a:t>
+            </a:r>
+            <a:r>
+              <a:rPr lang="en-US" sz="2971">
+                <a:solidFill>
+                  <a:srgbClr val="2F3A4F"/>
+                </a:solidFill>
                 <a:latin typeface="Georgia"/>
                 <a:ea typeface="Georgia"/>
                 <a:cs typeface="Georgia"/>
                 <a:sym typeface="Georgia"/>
               </a:rPr>
-              <a:t>₹27,000 — 60% advance · ₹18,000 — 40% on completion and sign-off</a:t>
+              <a:t>27,000 — 60% advance · </a:t>
+            </a:r>
+            <a:r>
+              <a:rPr lang="en-US" sz="2971">
+                <a:solidFill>
+                  <a:srgbClr val="2F3A4F"/>
+                </a:solidFill>
+                <a:latin typeface="Playfair Display Bold"/>
+                <a:ea typeface="Playfair Display Bold"/>
+                <a:cs typeface="Playfair Display Bold"/>
+                <a:sym typeface="Playfair Display Bold"/>
+              </a:rPr>
+              <a:t>₹</a:t>
+            </a:r>
+            <a:r>
+              <a:rPr lang="en-US" sz="2971">
+                <a:solidFill>
+                  <a:srgbClr val="2F3A4F"/>
+                </a:solidFill>
+                <a:latin typeface="Georgia"/>
+                <a:ea typeface="Georgia"/>
+                <a:cs typeface="Georgia"/>
+                <a:sym typeface="Georgia"/>
+              </a:rPr>
+              <a:t>18,000 — 40% on completion and sign-off</a:t>
             </a:r>
           </a:p>
         </p:txBody>
